--- a/material/Python/07_딕셔너리.pptx
+++ b/material/Python/07_딕셔너리.pptx
@@ -1,6 +1,6 @@
 
 <file path=ppt/presentation.xml><?xml version="1.0" encoding="utf-8"?>
-<p:presentation xmlns:a="http://schemas.openxmlformats.org/drawingml/2006/main" xmlns:r="http://schemas.openxmlformats.org/officeDocument/2006/relationships" xmlns:p="http://schemas.openxmlformats.org/presentationml/2006/main" saveSubsetFonts="1">
+<p:presentation xmlns:a="http://schemas.openxmlformats.org/drawingml/2006/main" xmlns:r="http://schemas.openxmlformats.org/officeDocument/2006/relationships" xmlns:p="http://schemas.openxmlformats.org/presentationml/2006/main" embedTrueTypeFonts="1" saveSubsetFonts="1">
   <p:sldMasterIdLst>
     <p:sldMasterId id="2147483660" r:id="rId1"/>
   </p:sldMasterIdLst>
@@ -41,6 +41,29 @@
   </p:sldIdLst>
   <p:sldSz cx="12192000" cy="6858000"/>
   <p:notesSz cx="6858000" cy="9144000"/>
+  <p:embeddedFontLst>
+    <p:embeddedFont>
+      <p:font typeface="G마켓 산스 TTF Bold" panose="02000000000000000000" pitchFamily="2" charset="-127"/>
+      <p:bold r:id="rId33"/>
+    </p:embeddedFont>
+    <p:embeddedFont>
+      <p:font typeface="Pretendard Black" panose="02000A03000000020004" pitchFamily="2" charset="-127"/>
+      <p:bold r:id="rId34"/>
+    </p:embeddedFont>
+    <p:embeddedFont>
+      <p:font typeface="Pretendard Light" panose="02000403000000020004" pitchFamily="2" charset="-127"/>
+      <p:regular r:id="rId35"/>
+    </p:embeddedFont>
+    <p:embeddedFont>
+      <p:font typeface="Pretendard Medium" panose="02000603000000020004" pitchFamily="2" charset="-127"/>
+      <p:regular r:id="rId36"/>
+    </p:embeddedFont>
+    <p:embeddedFont>
+      <p:font typeface="메이플스토리" panose="02000300000000000000" pitchFamily="2" charset="-127"/>
+      <p:regular r:id="rId37"/>
+      <p:bold r:id="rId38"/>
+    </p:embeddedFont>
+  </p:embeddedFontLst>
   <p:defaultTextStyle>
     <a:defPPr>
       <a:defRPr lang="ko-KR"/>
@@ -247,7 +270,7 @@
             <a:fld id="{A13A867C-D490-40C2-AB8D-A60FA70A9BF5}" type="datetimeFigureOut">
               <a:rPr lang="ko-KR" altLang="en-US" smtClean="0"/>
               <a:pPr/>
-              <a:t>2025-07-17</a:t>
+              <a:t>2025-08-21</a:t>
             </a:fld>
             <a:endParaRPr lang="ko-KR" altLang="en-US" dirty="0"/>
           </a:p>
@@ -3599,7 +3622,7 @@
           <a:p>
             <a:fld id="{442BEE3F-2E9A-4FD8-8B8A-8619F3E161C0}" type="datetime1">
               <a:rPr lang="ko-KR" altLang="en-US" smtClean="0"/>
-              <a:t>2025-07-17</a:t>
+              <a:t>2025-08-21</a:t>
             </a:fld>
             <a:endParaRPr lang="ko-KR" altLang="en-US"/>
           </a:p>
@@ -3886,7 +3909,7 @@
           <a:p>
             <a:fld id="{0F78D9C4-20C1-4B15-A116-16DC77AD9A1E}" type="datetime1">
               <a:rPr lang="ko-KR" altLang="en-US" smtClean="0"/>
-              <a:t>2025-07-17</a:t>
+              <a:t>2025-08-21</a:t>
             </a:fld>
             <a:endParaRPr lang="ko-KR" altLang="en-US"/>
           </a:p>
@@ -4061,7 +4084,7 @@
           <a:p>
             <a:fld id="{7F5E23C3-0E3D-4E4E-8486-D7FB4C073DC1}" type="datetime1">
               <a:rPr lang="ko-KR" altLang="en-US" smtClean="0"/>
-              <a:t>2025-07-17</a:t>
+              <a:t>2025-08-21</a:t>
             </a:fld>
             <a:endParaRPr lang="ko-KR" altLang="en-US"/>
           </a:p>
@@ -4390,7 +4413,7 @@
           <a:p>
             <a:fld id="{7F5E23C3-0E3D-4E4E-8486-D7FB4C073DC1}" type="datetime1">
               <a:rPr lang="ko-KR" altLang="en-US" smtClean="0"/>
-              <a:t>2025-07-17</a:t>
+              <a:t>2025-08-21</a:t>
             </a:fld>
             <a:endParaRPr lang="ko-KR" altLang="en-US"/>
           </a:p>
@@ -5200,7 +5223,7 @@
           <a:p>
             <a:fld id="{0F78D9C4-20C1-4B15-A116-16DC77AD9A1E}" type="datetime1">
               <a:rPr lang="ko-KR" altLang="en-US" smtClean="0"/>
-              <a:t>2025-07-17</a:t>
+              <a:t>2025-08-21</a:t>
             </a:fld>
             <a:endParaRPr lang="ko-KR" altLang="en-US"/>
           </a:p>
@@ -5746,7 +5769,7 @@
           <a:p>
             <a:fld id="{0F78D9C4-20C1-4B15-A116-16DC77AD9A1E}" type="datetime1">
               <a:rPr lang="ko-KR" altLang="en-US" smtClean="0"/>
-              <a:t>2025-07-17</a:t>
+              <a:t>2025-08-21</a:t>
             </a:fld>
             <a:endParaRPr lang="ko-KR" altLang="en-US"/>
           </a:p>
@@ -6236,7 +6259,7 @@
           <a:p>
             <a:fld id="{0F78D9C4-20C1-4B15-A116-16DC77AD9A1E}" type="datetime1">
               <a:rPr lang="ko-KR" altLang="en-US" smtClean="0"/>
-              <a:t>2025-07-17</a:t>
+              <a:t>2025-08-21</a:t>
             </a:fld>
             <a:endParaRPr lang="ko-KR" altLang="en-US"/>
           </a:p>
@@ -6663,7 +6686,7 @@
           <a:p>
             <a:fld id="{0F78D9C4-20C1-4B15-A116-16DC77AD9A1E}" type="datetime1">
               <a:rPr lang="ko-KR" altLang="en-US" smtClean="0"/>
-              <a:t>2025-07-17</a:t>
+              <a:t>2025-08-21</a:t>
             </a:fld>
             <a:endParaRPr lang="ko-KR" altLang="en-US"/>
           </a:p>
@@ -7171,7 +7194,7 @@
           <a:p>
             <a:fld id="{0F78D9C4-20C1-4B15-A116-16DC77AD9A1E}" type="datetime1">
               <a:rPr lang="ko-KR" altLang="en-US" smtClean="0"/>
-              <a:t>2025-07-17</a:t>
+              <a:t>2025-08-21</a:t>
             </a:fld>
             <a:endParaRPr lang="ko-KR" altLang="en-US"/>
           </a:p>
@@ -7800,7 +7823,7 @@
           <a:p>
             <a:fld id="{0F78D9C4-20C1-4B15-A116-16DC77AD9A1E}" type="datetime1">
               <a:rPr lang="ko-KR" altLang="en-US" smtClean="0"/>
-              <a:t>2025-07-17</a:t>
+              <a:t>2025-08-21</a:t>
             </a:fld>
             <a:endParaRPr lang="ko-KR" altLang="en-US"/>
           </a:p>
@@ -8196,7 +8219,7 @@
           <a:p>
             <a:fld id="{0F78D9C4-20C1-4B15-A116-16DC77AD9A1E}" type="datetime1">
               <a:rPr lang="ko-KR" altLang="en-US" smtClean="0"/>
-              <a:t>2025-07-17</a:t>
+              <a:t>2025-08-21</a:t>
             </a:fld>
             <a:endParaRPr lang="ko-KR" altLang="en-US"/>
           </a:p>
@@ -8585,7 +8608,7 @@
           <a:p>
             <a:fld id="{0F78D9C4-20C1-4B15-A116-16DC77AD9A1E}" type="datetime1">
               <a:rPr lang="ko-KR" altLang="en-US" smtClean="0"/>
-              <a:t>2025-07-17</a:t>
+              <a:t>2025-08-21</a:t>
             </a:fld>
             <a:endParaRPr lang="ko-KR" altLang="en-US"/>
           </a:p>
@@ -8966,7 +8989,7 @@
           <a:p>
             <a:fld id="{0F78D9C4-20C1-4B15-A116-16DC77AD9A1E}" type="datetime1">
               <a:rPr lang="ko-KR" altLang="en-US" smtClean="0"/>
-              <a:t>2025-07-17</a:t>
+              <a:t>2025-08-21</a:t>
             </a:fld>
             <a:endParaRPr lang="ko-KR" altLang="en-US"/>
           </a:p>
@@ -9678,7 +9701,7 @@
           <a:p>
             <a:fld id="{0F78D9C4-20C1-4B15-A116-16DC77AD9A1E}" type="datetime1">
               <a:rPr lang="ko-KR" altLang="en-US" smtClean="0"/>
-              <a:t>2025-07-17</a:t>
+              <a:t>2025-08-21</a:t>
             </a:fld>
             <a:endParaRPr lang="ko-KR" altLang="en-US"/>
           </a:p>
@@ -10221,7 +10244,7 @@
           <a:p>
             <a:fld id="{0F78D9C4-20C1-4B15-A116-16DC77AD9A1E}" type="datetime1">
               <a:rPr lang="ko-KR" altLang="en-US" smtClean="0"/>
-              <a:t>2025-07-17</a:t>
+              <a:t>2025-08-21</a:t>
             </a:fld>
             <a:endParaRPr lang="ko-KR" altLang="en-US"/>
           </a:p>
@@ -10504,7 +10527,7 @@
           <a:p>
             <a:fld id="{0F78D9C4-20C1-4B15-A116-16DC77AD9A1E}" type="datetime1">
               <a:rPr lang="ko-KR" altLang="en-US" smtClean="0"/>
-              <a:t>2025-07-17</a:t>
+              <a:t>2025-08-21</a:t>
             </a:fld>
             <a:endParaRPr lang="ko-KR" altLang="en-US"/>
           </a:p>
@@ -11052,7 +11075,7 @@
           <a:p>
             <a:fld id="{0F78D9C4-20C1-4B15-A116-16DC77AD9A1E}" type="datetime1">
               <a:rPr lang="ko-KR" altLang="en-US" smtClean="0"/>
-              <a:t>2025-07-17</a:t>
+              <a:t>2025-08-21</a:t>
             </a:fld>
             <a:endParaRPr lang="ko-KR" altLang="en-US"/>
           </a:p>
@@ -11677,7 +11700,7 @@
           <a:p>
             <a:fld id="{0F78D9C4-20C1-4B15-A116-16DC77AD9A1E}" type="datetime1">
               <a:rPr lang="ko-KR" altLang="en-US" smtClean="0"/>
-              <a:t>2025-07-17</a:t>
+              <a:t>2025-08-21</a:t>
             </a:fld>
             <a:endParaRPr lang="ko-KR" altLang="en-US"/>
           </a:p>
@@ -12205,7 +12228,7 @@
           <a:p>
             <a:fld id="{0F78D9C4-20C1-4B15-A116-16DC77AD9A1E}" type="datetime1">
               <a:rPr lang="ko-KR" altLang="en-US" smtClean="0"/>
-              <a:t>2025-07-17</a:t>
+              <a:t>2025-08-21</a:t>
             </a:fld>
             <a:endParaRPr lang="ko-KR" altLang="en-US"/>
           </a:p>
@@ -12698,7 +12721,7 @@
           <a:p>
             <a:fld id="{0F78D9C4-20C1-4B15-A116-16DC77AD9A1E}" type="datetime1">
               <a:rPr lang="ko-KR" altLang="en-US" smtClean="0"/>
-              <a:t>2025-07-17</a:t>
+              <a:t>2025-08-21</a:t>
             </a:fld>
             <a:endParaRPr lang="ko-KR" altLang="en-US"/>
           </a:p>
@@ -13617,7 +13640,7 @@
           <a:p>
             <a:fld id="{76022175-F16A-4A96-8E45-178BE9345AE9}" type="datetime6">
               <a:rPr lang="ko-KR" altLang="en-US" smtClean="0"/>
-              <a:t>2025년 7월</a:t>
+              <a:t>2025년 8월</a:t>
             </a:fld>
             <a:endParaRPr lang="ko-KR" altLang="en-US"/>
           </a:p>
@@ -14170,7 +14193,7 @@
           <a:p>
             <a:fld id="{76022175-F16A-4A96-8E45-178BE9345AE9}" type="datetime6">
               <a:rPr lang="ko-KR" altLang="en-US" smtClean="0"/>
-              <a:t>2025년 7월</a:t>
+              <a:t>2025년 8월</a:t>
             </a:fld>
             <a:endParaRPr lang="ko-KR" altLang="en-US"/>
           </a:p>
@@ -14715,7 +14738,7 @@
           <a:p>
             <a:fld id="{76022175-F16A-4A96-8E45-178BE9345AE9}" type="datetime6">
               <a:rPr lang="ko-KR" altLang="en-US" smtClean="0"/>
-              <a:t>2025년 7월</a:t>
+              <a:t>2025년 8월</a:t>
             </a:fld>
             <a:endParaRPr lang="ko-KR" altLang="en-US"/>
           </a:p>
@@ -15024,7 +15047,7 @@
           <a:p>
             <a:fld id="{0F78D9C4-20C1-4B15-A116-16DC77AD9A1E}" type="datetime1">
               <a:rPr lang="ko-KR" altLang="en-US" smtClean="0"/>
-              <a:t>2025-07-17</a:t>
+              <a:t>2025-08-21</a:t>
             </a:fld>
             <a:endParaRPr lang="ko-KR" altLang="en-US"/>
           </a:p>
@@ -15753,7 +15776,7 @@
           <a:p>
             <a:fld id="{0F78D9C4-20C1-4B15-A116-16DC77AD9A1E}" type="datetime1">
               <a:rPr lang="ko-KR" altLang="en-US" smtClean="0"/>
-              <a:t>2025-07-17</a:t>
+              <a:t>2025-08-21</a:t>
             </a:fld>
             <a:endParaRPr lang="ko-KR" altLang="en-US"/>
           </a:p>
@@ -16248,7 +16271,7 @@
           <a:p>
             <a:fld id="{0F78D9C4-20C1-4B15-A116-16DC77AD9A1E}" type="datetime1">
               <a:rPr lang="ko-KR" altLang="en-US" smtClean="0"/>
-              <a:t>2025-07-17</a:t>
+              <a:t>2025-08-21</a:t>
             </a:fld>
             <a:endParaRPr lang="ko-KR" altLang="en-US"/>
           </a:p>
@@ -16903,7 +16926,7 @@
           <a:p>
             <a:fld id="{0F78D9C4-20C1-4B15-A116-16DC77AD9A1E}" type="datetime1">
               <a:rPr lang="ko-KR" altLang="en-US" smtClean="0"/>
-              <a:t>2025-07-17</a:t>
+              <a:t>2025-08-21</a:t>
             </a:fld>
             <a:endParaRPr lang="ko-KR" altLang="en-US"/>
           </a:p>
@@ -17305,7 +17328,7 @@
           <a:p>
             <a:fld id="{0F78D9C4-20C1-4B15-A116-16DC77AD9A1E}" type="datetime1">
               <a:rPr lang="ko-KR" altLang="en-US" smtClean="0"/>
-              <a:t>2025-07-17</a:t>
+              <a:t>2025-08-21</a:t>
             </a:fld>
             <a:endParaRPr lang="ko-KR" altLang="en-US"/>
           </a:p>
@@ -17817,7 +17840,7 @@
           <a:p>
             <a:fld id="{0F78D9C4-20C1-4B15-A116-16DC77AD9A1E}" type="datetime1">
               <a:rPr lang="ko-KR" altLang="en-US" smtClean="0"/>
-              <a:t>2025-07-17</a:t>
+              <a:t>2025-08-21</a:t>
             </a:fld>
             <a:endParaRPr lang="ko-KR" altLang="en-US"/>
           </a:p>
